--- a/carpentry/intake-142/PowerPoint/Day-24_2026-12-10_Week-7.pptx
+++ b/carpentry/intake-142/PowerPoint/Day-24_2026-12-10_Week-7.pptx
@@ -1201,7 +1201,7 @@
           <a:p/>
           <a:p>
             <a:r>
-              <a:t>Path A, look at the regrouping example on page 66. When the fraction being removed is larger than the fractional part available, exchange one whole for the common denominator's number of parts. The total quantity stays equal even though its written form changes. For example, one whole equals eight eighths; that is why eighths can be added to the fractional part while the whole-number part decreases by one. What would be wrong with adding the fractional parts without reducing the whole number? You would increase the original quantity instead of rewriting it.</a:t>
+              <a:t>Path A, look at the regrouping example on page 99. When the fraction being removed is larger than the fractional part available, exchange one whole for the common denominator's number of parts. The total quantity stays equal even though its written form changes. For example, one whole equals eight eighths; that is why eighths can be added to the fractional part while the whole-number part decreases by one. What would be wrong with adding the fractional parts without reducing the whole number? You would increase the original quantity instead of rewriting it.</a:t>
             </a:r>
           </a:p>
         </p:txBody>
@@ -1277,7 +1277,7 @@
           <a:p/>
           <a:p>
             <a:r>
-              <a:t>Path B, page 127 shows an equation as a balance. To isolate a missing dimension, undo the operation connecting it to the known values, and do that equally on both sides. For a rectangle, area equals length times width, so dividing both sides by the known length leaves width. What check returns us to the original statement? Multiply the proposed width by the length and see whether it recreates the area. This substitution checks the relationship, which is stronger evidence than simply repeating the same calculator division.</a:t>
+              <a:t>Path B, pages 195–196 shows an equation as a balance. To isolate a missing dimension, undo the operation connecting it to the known values, and do that equally on both sides. For a rectangle, area equals length times width, so dividing both sides by the known length leaves width. What check returns us to the original statement? Multiply the proposed width by the length and see whether it recreates the area. This substitution checks the relationship, which is stronger evidence than simply repeating the same calculator division.</a:t>
             </a:r>
           </a:p>
         </p:txBody>
@@ -1353,7 +1353,7 @@
           <a:p/>
           <a:p>
             <a:r>
-              <a:t>Path C, revisit the right-triangle relationship on page 192 before choosing a calculation. The hypotenuse is across from the right angle and is the longest side. If it is unknown and both legs are given, add their squares and take a square root. If a leg is unknown, subtract the known leg's square from the hypotenuse's square first. What common error does the diagram prevent? Adding the squares when the unknown is a leg. Side labels determine the structure of the equation before any keys are pressed.</a:t>
+              <a:t>Path C, revisit the right-triangle relationship on page 302 before choosing a calculation. The hypotenuse is across from the right angle and is the longest side. If it is unknown and both legs are given, add their squares and take a square root. If a leg is unknown, subtract the known leg's square from the hypotenuse's square first. What common error does the diagram prevent? Adding the squares when the unknown is a leg. Side labels determine the structure of the equation before any keys are pressed.</a:t>
             </a:r>
           </a:p>
         </p:txBody>
@@ -2775,7 +2775,7 @@
           <a:p/>
           <a:p>
             <a:r>
-              <a:t>The next block is formative mixed practice. We will use a previewed ten-question set in Numeracy Hub or the exact ten paper fallback items shown in the plan. Your written method matters as much as the result because it tells us what to revise next. Keep the formula sheet on page 219 and conversion factors on pages 220–221 available. This practice gives feedback about taught skills; it is not an institutional pass-or-fail test.</a:t>
+              <a:t>The next block is formative mixed practice. We will use a previewed ten-question set in Numeracy Hub or the exact ten paper fallback items shown in the plan. Your written method matters as much as the result because it tells us what to revise next. Keep the formula sheet on page 361 and conversion factors on pages 362–363 available. This practice gives feedback about taught skills; it is not an institutional pass-or-fail test.</a:t>
             </a:r>
           </a:p>
         </p:txBody>
@@ -3079,7 +3079,7 @@
           <a:p/>
           <a:p>
             <a:r>
-              <a:t>The formula sheet on page 219 is a reference, not a menu to try at random. Read the unknown in the question first. Boundary points toward perimeter; coverage points toward area; space inside a prism points toward volume. Identify the drawing and dimensions, then choose the relevant formula from the taught topics selected today. What determines whether the answer needs square units? The quantity is an area. Copying a formula without checking what it measures can produce tidy arithmetic that answers a different question.</a:t>
+              <a:t>The formula sheet on page 361 is a reference, not a menu to try at random. Read the unknown in the question first. Boundary points toward perimeter; coverage points toward area; space inside a prism points toward volume. Identify the drawing and dimensions, then choose the relevant formula from the taught topics selected today. What determines whether the answer needs square units? The quantity is an area. Copying a formula without checking what it measures can produce tidy arithmetic that answers a different question.</a:t>
             </a:r>
           </a:p>
         </p:txBody>
@@ -6067,7 +6067,7 @@
                 </a:solidFill>
                 <a:latin typeface="Arial"/>
               </a:rPr>
-              <a:t>Textbook  |  page 192</a:t>
+              <a:t>Textbook  |  page 302</a:t>
             </a:r>
           </a:p>
         </p:txBody>
@@ -6115,7 +6115,7 @@
                 </a:solidFill>
                 <a:latin typeface="Arial"/>
               </a:rPr>
-              <a:t>Textbook Chapter 4–5 pp.56–87; Chapter 7–8 pp.108–134; Chapter 12–13 pp.188–209, selected</a:t>
+              <a:t>Textbook Chapter 4–5 pp.88–132; Chapter 7–8 pp.164–204; Chapter 12–13 pp.298–333, selected</a:t>
             </a:r>
           </a:p>
         </p:txBody>
@@ -6801,7 +6801,7 @@
                 </a:solidFill>
                 <a:latin typeface="Arial"/>
               </a:rPr>
-              <a:t>Textbook Chapter 4–5 pp.56–87; Chapter 7–8 pp.108–134; Chapter 12–13 pp.188–209, selected</a:t>
+              <a:t>Textbook Chapter 4–5 pp.88–132; Chapter 7–8 pp.164–204; Chapter 12–13 pp.298–333, selected</a:t>
             </a:r>
           </a:p>
         </p:txBody>
@@ -7559,7 +7559,7 @@
                 </a:solidFill>
                 <a:latin typeface="Arial"/>
               </a:rPr>
-              <a:t>Textbook Chapter 4–5 pp.56–87; Chapter 7–8 pp.108–134; Chapter 12–13 pp.188–209, selected</a:t>
+              <a:t>Textbook Chapter 4–5 pp.88–132; Chapter 7–8 pp.164–204; Chapter 12–13 pp.298–333, selected</a:t>
             </a:r>
           </a:p>
         </p:txBody>
@@ -7759,7 +7759,7 @@
                 </a:solidFill>
                 <a:latin typeface="Arial"/>
               </a:rPr>
-              <a:t>Resources: Path A: 4A Q14–17 p.26; 5A Q12–15 p.33. B: 7A Q11–14 pp.45–46; 8C Q1–2 p.55. C: 12C Q1–2 p.79; 13A Q6,10 p.82.</a:t>
+              <a:t>Resources: Path A: 4A Q14–17 p.36; 5A Q12–15 p.46. B: 7A Q11–14 p.68; 8C Q1–2 p.81. C: 12C Q1–2 p.118; 13A Q6,10 p.128.</a:t>
             </a:r>
           </a:p>
         </p:txBody>
@@ -8373,7 +8373,7 @@
                 </a:solidFill>
                 <a:latin typeface="Arial"/>
               </a:rPr>
-              <a:t>Textbook Chapter 4–5 pp.56–87; Chapter 7–8 pp.108–134; Chapter 12–13 pp.188–209, selected</a:t>
+              <a:t>Textbook Chapter 4–5 pp.88–132; Chapter 7–8 pp.164–204; Chapter 12–13 pp.298–333, selected</a:t>
             </a:r>
           </a:p>
         </p:txBody>
@@ -8573,7 +8573,7 @@
                 </a:solidFill>
                 <a:latin typeface="Arial"/>
               </a:rPr>
-              <a:t>Resources: Path A: 4A Q14–17 p.26; 5A Q12–15 p.33. B: 7A Q11–14 pp.45–46; 8C Q1–2 p.55. C: 12C Q1–2 p.79; 13A Q6,10 p.82.</a:t>
+              <a:t>Resources: Path A: 4A Q14–17 p.36; 5A Q12–15 p.46. B: 7A Q11–14 p.68; 8C Q1–2 p.81. C: 12C Q1–2 p.118; 13A Q6,10 p.128.</a:t>
             </a:r>
           </a:p>
         </p:txBody>
@@ -9187,7 +9187,7 @@
                 </a:solidFill>
                 <a:latin typeface="Arial"/>
               </a:rPr>
-              <a:t>Textbook Chapter 4–5 pp.56–87; Chapter 7–8 pp.108–134; Chapter 12–13 pp.188–209, selected</a:t>
+              <a:t>Textbook Chapter 4–5 pp.88–132; Chapter 7–8 pp.164–204; Chapter 12–13 pp.298–333, selected</a:t>
             </a:r>
           </a:p>
         </p:txBody>
@@ -9963,7 +9963,7 @@
                 </a:solidFill>
                 <a:latin typeface="Arial"/>
               </a:rPr>
-              <a:t>Textbook Chapter 4–5 pp.56–87; Chapter 7–8 pp.108–134; Chapter 12–13 pp.188–209, selected</a:t>
+              <a:t>Textbook Chapter 4–5 pp.88–132; Chapter 7–8 pp.164–204; Chapter 12–13 pp.298–333, selected</a:t>
             </a:r>
           </a:p>
         </p:txBody>
@@ -10922,7 +10922,7 @@
                 </a:solidFill>
                 <a:latin typeface="Arial"/>
               </a:rPr>
-              <a:t>Textbook Chapter 4–5 pp.56–87; Chapter 7–8 pp.108–134; Chapter 12–13 pp.188–209, selected</a:t>
+              <a:t>Textbook Chapter 4–5 pp.88–132; Chapter 7–8 pp.164–204; Chapter 12–13 pp.298–333, selected</a:t>
             </a:r>
           </a:p>
         </p:txBody>
@@ -11608,7 +11608,7 @@
                 </a:solidFill>
                 <a:latin typeface="Arial"/>
               </a:rPr>
-              <a:t>Textbook Chapter 4–5 pp.56–87; Chapter 7–8 pp.108–134; Chapter 12–13 pp.188–209, selected</a:t>
+              <a:t>Textbook Chapter 4–5 pp.88–132; Chapter 7–8 pp.164–204; Chapter 12–13 pp.298–333, selected</a:t>
             </a:r>
           </a:p>
         </p:txBody>
@@ -12294,7 +12294,7 @@
                 </a:solidFill>
                 <a:latin typeface="Arial"/>
               </a:rPr>
-              <a:t>Textbook Chapter 4–5 pp.56–87; Chapter 7–8 pp.108–134; Chapter 12–13 pp.188–209, selected</a:t>
+              <a:t>Textbook Chapter 4–5 pp.88–132; Chapter 7–8 pp.164–204; Chapter 12–13 pp.298–333, selected</a:t>
             </a:r>
           </a:p>
         </p:txBody>
@@ -13005,7 +13005,7 @@
                 </a:solidFill>
                 <a:latin typeface="Arial"/>
               </a:rPr>
-              <a:t>Textbook Chapter 4–5 pp.56–87; Chapter 7–8 pp.108–134; Chapter 12–13 pp.188–209, selected</a:t>
+              <a:t>Textbook Chapter 4–5 pp.88–132; Chapter 7–8 pp.164–204; Chapter 12–13 pp.298–333, selected</a:t>
             </a:r>
           </a:p>
         </p:txBody>
@@ -17043,7 +17043,7 @@
                 </a:solidFill>
                 <a:latin typeface="Arial"/>
               </a:rPr>
-              <a:t>Textbook Chapter 4–5 pp.56–87; Chapter 7–8 pp.108–134; Chapter 12–13 pp.188–209, selected</a:t>
+              <a:t>Textbook Chapter 4–5 pp.88–132; Chapter 7–8 pp.164–204; Chapter 12–13 pp.298–333, selected</a:t>
             </a:r>
           </a:p>
         </p:txBody>
@@ -17729,7 +17729,7 @@
                 </a:solidFill>
                 <a:latin typeface="Arial"/>
               </a:rPr>
-              <a:t>Textbook Chapter 4–5 pp.56–87; Chapter 7–8 pp.108–134; Chapter 12–13 pp.188–209, selected</a:t>
+              <a:t>Textbook Chapter 4–5 pp.88–132; Chapter 7–8 pp.164–204; Chapter 12–13 pp.298–333, selected</a:t>
             </a:r>
           </a:p>
         </p:txBody>
@@ -18440,7 +18440,7 @@
                 </a:solidFill>
                 <a:latin typeface="Arial"/>
               </a:rPr>
-              <a:t>Textbook Chapter 4–5 pp.56–87; Chapter 7–8 pp.108–134; Chapter 12–13 pp.188–209, selected</a:t>
+              <a:t>Textbook Chapter 4–5 pp.88–132; Chapter 7–8 pp.164–204; Chapter 12–13 pp.298–333, selected</a:t>
             </a:r>
           </a:p>
         </p:txBody>
@@ -18640,7 +18640,7 @@
                 </a:solidFill>
                 <a:latin typeface="Arial"/>
               </a:rPr>
-              <a:t>Resources: Path A: 4A Q14–17 p.26; 5A Q12–15 p.33. B: 7A Q11–14 pp.45–46; 8C Q1–2 p.55. C: 12C Q1–2 p.79; 13A Q6,10 p.82.</a:t>
+              <a:t>Resources: Path A: 4A Q14–17 p.36; 5A Q12–15 p.46. B: 7A Q11–14 p.68; 8C Q1–2 p.81. C: 12C Q1–2 p.118; 13A Q6,10 p.128.</a:t>
             </a:r>
           </a:p>
         </p:txBody>
@@ -19254,7 +19254,7 @@
                 </a:solidFill>
                 <a:latin typeface="Arial"/>
               </a:rPr>
-              <a:t>Textbook Chapter 4–5 pp.56–87; Chapter 7–8 pp.108–134; Chapter 12–13 pp.188–209, selected</a:t>
+              <a:t>Textbook Chapter 4–5 pp.88–132; Chapter 7–8 pp.164–204; Chapter 12–13 pp.298–333, selected</a:t>
             </a:r>
           </a:p>
         </p:txBody>
@@ -19940,7 +19940,7 @@
                 </a:solidFill>
                 <a:latin typeface="Arial"/>
               </a:rPr>
-              <a:t>Textbook Chapter 4–5 pp.56–87; Chapter 7–8 pp.108–134; Chapter 12–13 pp.188–209, selected</a:t>
+              <a:t>Textbook Chapter 4–5 pp.88–132; Chapter 7–8 pp.164–204; Chapter 12–13 pp.298–333, selected</a:t>
             </a:r>
           </a:p>
         </p:txBody>
@@ -20651,7 +20651,7 @@
                 </a:solidFill>
                 <a:latin typeface="Arial"/>
               </a:rPr>
-              <a:t>Textbook Chapter 4–5 pp.56–87; Chapter 7–8 pp.108–134; Chapter 12–13 pp.188–209, selected</a:t>
+              <a:t>Textbook Chapter 4–5 pp.88–132; Chapter 7–8 pp.164–204; Chapter 12–13 pp.298–333, selected</a:t>
             </a:r>
           </a:p>
         </p:txBody>
@@ -21362,7 +21362,7 @@
                 </a:solidFill>
                 <a:latin typeface="Arial"/>
               </a:rPr>
-              <a:t>Textbook Chapter 4–5 pp.56–87; Chapter 7–8 pp.108–134; Chapter 12–13 pp.188–209, selected</a:t>
+              <a:t>Textbook Chapter 4–5 pp.88–132; Chapter 7–8 pp.164–204; Chapter 12–13 pp.298–333, selected</a:t>
             </a:r>
           </a:p>
         </p:txBody>
@@ -21562,7 +21562,7 @@
                 </a:solidFill>
                 <a:latin typeface="Arial"/>
               </a:rPr>
-              <a:t>Resources: Path A: 4A Q14–17 p.26; 5A Q12–15 p.33. B: 7A Q11–14 pp.45–46; 8C Q1–2 p.55. C: 12C Q1–2 p.79; 13A Q6,10 p.82.</a:t>
+              <a:t>Resources: Path A: 4A Q14–17 p.36; 5A Q12–15 p.46. B: 7A Q11–14 p.68; 8C Q1–2 p.81. C: 12C Q1–2 p.118; 13A Q6,10 p.128.</a:t>
             </a:r>
           </a:p>
         </p:txBody>
@@ -22841,7 +22841,7 @@
                 </a:solidFill>
                 <a:latin typeface="Arial"/>
               </a:rPr>
-              <a:t>Textbook formula sheet p.219; conversion factors pp.220–221; relevant chapters as needed</a:t>
+              <a:t>Textbook formula sheet p.361; conversion factors pp.362–363; relevant chapters as needed</a:t>
             </a:r>
           </a:p>
         </p:txBody>
@@ -23041,7 +23041,7 @@
                 </a:solidFill>
                 <a:latin typeface="Arial"/>
               </a:rPr>
-              <a:t>Textbook formula sheet p.219; conversion factors pp.220–221; relevant chapters as needed</a:t>
+              <a:t>Textbook formula sheet p.361; conversion factors pp.362–363; relevant chapters as needed</a:t>
             </a:r>
           </a:p>
         </p:txBody>
@@ -23089,7 +23089,7 @@
                 </a:solidFill>
                 <a:latin typeface="Arial"/>
               </a:rPr>
-              <a:t>Paper fallback: 3A Q8–9 p.19; 6B Q2 p.41; 7A Q11 p.45; 8C Q1–2 p.55; 10A Q5–6 p.63; 12C Q1–2 p.79.</a:t>
+              <a:t>Paper fallback: 3A Q8–9 p.25; 6B Q2 p.57; 7A Q11 p.68; 8C Q1–2 p.81; 10A Q5–6 p.93; 12C Q1–2 p.118.</a:t>
             </a:r>
           </a:p>
         </p:txBody>
@@ -23751,7 +23751,7 @@
                 </a:solidFill>
                 <a:latin typeface="Arial"/>
               </a:rPr>
-              <a:t>Textbook formula sheet p.219; conversion factors pp.220–221; relevant chapters as needed</a:t>
+              <a:t>Textbook formula sheet p.361; conversion factors pp.362–363; relevant chapters as needed</a:t>
             </a:r>
           </a:p>
         </p:txBody>
@@ -23951,7 +23951,7 @@
                 </a:solidFill>
                 <a:latin typeface="Arial"/>
               </a:rPr>
-              <a:t>Resources: Paper fallback: 3A Q8–9 p.19; 6B Q2 p.41; 7A Q11 p.45; 8C Q1–2 p.55; 10A Q5–6 p.63; 12C Q1–2 p.79.</a:t>
+              <a:t>Resources: Paper fallback: 3A Q8–9 p.25; 6B Q2 p.57; 7A Q11 p.68; 8C Q1–2 p.81; 10A Q5–6 p.93; 12C Q1–2 p.118.</a:t>
             </a:r>
           </a:p>
         </p:txBody>
@@ -24520,7 +24520,7 @@
                 </a:solidFill>
                 <a:latin typeface="Arial"/>
               </a:rPr>
-              <a:t>Textbook Chapter 4–5 pp.56–87; Chapter 7–8 pp.108–134; Chapter 12–13 pp.188–209, selected</a:t>
+              <a:t>Textbook Chapter 4–5 pp.88–132; Chapter 7–8 pp.164–204; Chapter 12–13 pp.298–333, selected</a:t>
             </a:r>
           </a:p>
         </p:txBody>
@@ -24720,7 +24720,7 @@
                 </a:solidFill>
                 <a:latin typeface="Arial"/>
               </a:rPr>
-              <a:t>Textbook Chapter 4–5 pp.56–87; Chapter 7–8 pp.108–134; Chapter 12–13 pp.188–209, selected</a:t>
+              <a:t>Textbook Chapter 4–5 pp.88–132; Chapter 7–8 pp.164–204; Chapter 12–13 pp.298–333, selected</a:t>
             </a:r>
           </a:p>
         </p:txBody>
@@ -24768,7 +24768,7 @@
                 </a:solidFill>
                 <a:latin typeface="Arial"/>
               </a:rPr>
-              <a:t>Path A: 4A Q14–17 p.26; 5A Q12–15 p.33. B: 7A Q11–14 pp.45–46; 8C Q1–2 p.55. C: 12C Q1–2 p.79; 13A Q6,10 p.82.</a:t>
+              <a:t>Path A: 4A Q14–17 p.36; 5A Q12–15 p.46. B: 7A Q11–14 p.68; 8C Q1–2 p.81. C: 12C Q1–2 p.118; 13A Q6,10 p.128.</a:t>
             </a:r>
           </a:p>
         </p:txBody>
@@ -25565,7 +25565,7 @@
                 </a:solidFill>
                 <a:latin typeface="Arial"/>
               </a:rPr>
-              <a:t>Textbook formula sheet p.219; conversion factors pp.220–221; relevant chapters as needed</a:t>
+              <a:t>Textbook formula sheet p.361; conversion factors pp.362–363; relevant chapters as needed</a:t>
             </a:r>
           </a:p>
         </p:txBody>
@@ -26786,7 +26786,7 @@
                 </a:solidFill>
                 <a:latin typeface="Arial"/>
               </a:rPr>
-              <a:t>Textbook formula sheet p.219; conversion factors pp.220–221; relevant chapters as needed</a:t>
+              <a:t>Textbook formula sheet p.361; conversion factors pp.362–363; relevant chapters as needed</a:t>
             </a:r>
           </a:p>
         </p:txBody>
@@ -27902,7 +27902,7 @@
                 <a:ea typeface="Arial" pitchFamily="34" charset="-122"/>
                 <a:cs typeface="Arial" pitchFamily="34" charset="-120"/>
               </a:rPr>
-              <a:t>1. 3A Q8 — p.19</a:t>
+              <a:t>1. 3A Q8 — p.25</a:t>
             </a:r>
             <a:endParaRPr lang="en-US" sz="1800" dirty="0"/>
           </a:p>
@@ -27919,7 +27919,7 @@
                 <a:ea typeface="Arial" pitchFamily="34" charset="-122"/>
                 <a:cs typeface="Arial" pitchFamily="34" charset="-120"/>
               </a:rPr>
-              <a:t>2. 3A Q9 — p.19</a:t>
+              <a:t>2. 3A Q9 — p.25</a:t>
             </a:r>
             <a:endParaRPr lang="en-US" sz="1800" dirty="0"/>
           </a:p>
@@ -27936,7 +27936,7 @@
                 <a:ea typeface="Arial" pitchFamily="34" charset="-122"/>
                 <a:cs typeface="Arial" pitchFamily="34" charset="-120"/>
               </a:rPr>
-              <a:t>3. 6B Q2 — p.41</a:t>
+              <a:t>3. 6B Q2 — p.57</a:t>
             </a:r>
             <a:endParaRPr lang="en-US" sz="1800" dirty="0"/>
           </a:p>
@@ -27953,7 +27953,7 @@
                 <a:ea typeface="Arial" pitchFamily="34" charset="-122"/>
                 <a:cs typeface="Arial" pitchFamily="34" charset="-120"/>
               </a:rPr>
-              <a:t>4. 7A Q11 — p.45</a:t>
+              <a:t>4. 7A Q11 — p.68</a:t>
             </a:r>
             <a:endParaRPr lang="en-US" sz="1800" dirty="0"/>
           </a:p>
@@ -27970,7 +27970,7 @@
                 <a:ea typeface="Arial" pitchFamily="34" charset="-122"/>
                 <a:cs typeface="Arial" pitchFamily="34" charset="-120"/>
               </a:rPr>
-              <a:t>5. 8C Q1 — p.55</a:t>
+              <a:t>5. 8C Q1 — p.81</a:t>
             </a:r>
             <a:endParaRPr lang="en-US" sz="1800" dirty="0"/>
           </a:p>
@@ -28028,7 +28028,7 @@
                 <a:ea typeface="Arial" pitchFamily="34" charset="-122"/>
                 <a:cs typeface="Arial" pitchFamily="34" charset="-120"/>
               </a:rPr>
-              <a:t>6. 8C Q2 — p.55</a:t>
+              <a:t>6. 8C Q2 — p.81</a:t>
             </a:r>
             <a:endParaRPr lang="en-US" sz="1800" dirty="0"/>
           </a:p>
@@ -28045,7 +28045,7 @@
                 <a:ea typeface="Arial" pitchFamily="34" charset="-122"/>
                 <a:cs typeface="Arial" pitchFamily="34" charset="-120"/>
               </a:rPr>
-              <a:t>7. 10A Q5 — p.63</a:t>
+              <a:t>7. 10A Q5 — p.93</a:t>
             </a:r>
             <a:endParaRPr lang="en-US" sz="1800" dirty="0"/>
           </a:p>
@@ -28062,7 +28062,7 @@
                 <a:ea typeface="Arial" pitchFamily="34" charset="-122"/>
                 <a:cs typeface="Arial" pitchFamily="34" charset="-120"/>
               </a:rPr>
-              <a:t>8. 10A Q6 — p.63</a:t>
+              <a:t>8. 10A Q6 — p.93</a:t>
             </a:r>
             <a:endParaRPr lang="en-US" sz="1800" dirty="0"/>
           </a:p>
@@ -28079,7 +28079,7 @@
                 <a:ea typeface="Arial" pitchFamily="34" charset="-122"/>
                 <a:cs typeface="Arial" pitchFamily="34" charset="-120"/>
               </a:rPr>
-              <a:t>9. 12C Q1 — p.79</a:t>
+              <a:t>9. 12C Q1 — p.118</a:t>
             </a:r>
             <a:endParaRPr lang="en-US" sz="1800" dirty="0"/>
           </a:p>
@@ -28096,7 +28096,7 @@
                 <a:ea typeface="Arial" pitchFamily="34" charset="-122"/>
                 <a:cs typeface="Arial" pitchFamily="34" charset="-120"/>
               </a:rPr>
-              <a:t>10. 12C Q2 — p.79</a:t>
+              <a:t>10. 12C Q2 — p.118</a:t>
             </a:r>
             <a:endParaRPr lang="en-US" sz="1800" dirty="0"/>
           </a:p>
@@ -28774,7 +28774,7 @@
                 </a:solidFill>
                 <a:latin typeface="Arial"/>
               </a:rPr>
-              <a:t>Textbook  |  page 219</a:t>
+              <a:t>Textbook  |  page 361</a:t>
             </a:r>
           </a:p>
         </p:txBody>
@@ -28822,7 +28822,7 @@
                 </a:solidFill>
                 <a:latin typeface="Arial"/>
               </a:rPr>
-              <a:t>Textbook formula sheet p.219; conversion factors pp.220–221; relevant chapters as needed</a:t>
+              <a:t>Textbook formula sheet p.361; conversion factors pp.362–363; relevant chapters as needed</a:t>
             </a:r>
           </a:p>
         </p:txBody>
@@ -29460,7 +29460,7 @@
                 </a:solidFill>
                 <a:latin typeface="Arial"/>
               </a:rPr>
-              <a:t>Textbook  |  page 219</a:t>
+              <a:t>Textbook  |  page 361</a:t>
             </a:r>
           </a:p>
         </p:txBody>
@@ -29508,7 +29508,7 @@
                 </a:solidFill>
                 <a:latin typeface="Arial"/>
               </a:rPr>
-              <a:t>Textbook formula sheet p.219; conversion factors pp.220–221; relevant chapters as needed</a:t>
+              <a:t>Textbook formula sheet p.361; conversion factors pp.362–363; relevant chapters as needed</a:t>
             </a:r>
           </a:p>
         </p:txBody>
@@ -30194,7 +30194,7 @@
                 </a:solidFill>
                 <a:latin typeface="Arial"/>
               </a:rPr>
-              <a:t>Textbook formula sheet p.219; conversion factors pp.220–221; relevant chapters as needed</a:t>
+              <a:t>Textbook formula sheet p.361; conversion factors pp.362–363; relevant chapters as needed</a:t>
             </a:r>
           </a:p>
         </p:txBody>
@@ -30952,7 +30952,7 @@
                 </a:solidFill>
                 <a:latin typeface="Arial"/>
               </a:rPr>
-              <a:t>Textbook formula sheet p.219; conversion factors pp.220–221; relevant chapters as needed</a:t>
+              <a:t>Textbook formula sheet p.361; conversion factors pp.362–363; relevant chapters as needed</a:t>
             </a:r>
           </a:p>
         </p:txBody>
@@ -31152,7 +31152,7 @@
                 </a:solidFill>
                 <a:latin typeface="Arial"/>
               </a:rPr>
-              <a:t>Resources: Paper fallback: 3A Q8–9 p.19; 6B Q2 p.41; 7A Q11 p.45; 8C Q1–2 p.55; 10A Q5–6 p.63; 12C Q1–2 p.79.</a:t>
+              <a:t>Resources: Paper fallback: 3A Q8–9 p.25; 6B Q2 p.57; 7A Q11 p.68; 8C Q1–2 p.81; 10A Q5–6 p.93; 12C Q1–2 p.118.</a:t>
             </a:r>
           </a:p>
         </p:txBody>
@@ -31766,7 +31766,7 @@
                 </a:solidFill>
                 <a:latin typeface="Arial"/>
               </a:rPr>
-              <a:t>Textbook formula sheet p.219; conversion factors pp.220–221; relevant chapters as needed</a:t>
+              <a:t>Textbook formula sheet p.361; conversion factors pp.362–363; relevant chapters as needed</a:t>
             </a:r>
           </a:p>
         </p:txBody>
@@ -31966,7 +31966,7 @@
                 </a:solidFill>
                 <a:latin typeface="Arial"/>
               </a:rPr>
-              <a:t>Resources: Paper fallback: 3A Q8–9 p.19; 6B Q2 p.41; 7A Q11 p.45; 8C Q1–2 p.55; 10A Q5–6 p.63; 12C Q1–2 p.79.</a:t>
+              <a:t>Resources: Paper fallback: 3A Q8–9 p.25; 6B Q2 p.57; 7A Q11 p.68; 8C Q1–2 p.81; 10A Q5–6 p.93; 12C Q1–2 p.118.</a:t>
             </a:r>
           </a:p>
         </p:txBody>
@@ -32580,7 +32580,7 @@
                 </a:solidFill>
                 <a:latin typeface="Arial"/>
               </a:rPr>
-              <a:t>Textbook formula sheet p.219; conversion factors pp.220–221; relevant chapters as needed</a:t>
+              <a:t>Textbook formula sheet p.361; conversion factors pp.362–363; relevant chapters as needed</a:t>
             </a:r>
           </a:p>
         </p:txBody>
@@ -33356,7 +33356,7 @@
                 </a:solidFill>
                 <a:latin typeface="Arial"/>
               </a:rPr>
-              <a:t>Textbook formula sheet p.219; conversion factors pp.220–221; relevant chapters as needed</a:t>
+              <a:t>Textbook formula sheet p.361; conversion factors pp.362–363; relevant chapters as needed</a:t>
             </a:r>
           </a:p>
         </p:txBody>
@@ -34315,7 +34315,7 @@
                 </a:solidFill>
                 <a:latin typeface="Arial"/>
               </a:rPr>
-              <a:t>Textbook Chapter 4–5 pp.56–87; Chapter 7–8 pp.108–134; Chapter 12–13 pp.188–209, selected</a:t>
+              <a:t>Textbook Chapter 4–5 pp.88–132; Chapter 7–8 pp.164–204; Chapter 12–13 pp.298–333, selected</a:t>
             </a:r>
           </a:p>
         </p:txBody>
@@ -34515,7 +34515,7 @@
                 </a:solidFill>
                 <a:latin typeface="Arial"/>
               </a:rPr>
-              <a:t>Resources: Path A: 4A Q14–17 p.26; 5A Q12–15 p.33. B: 7A Q11–14 pp.45–46; 8C Q1–2 p.55. C: 12C Q1–2 p.79; 13A Q6,10 p.82.</a:t>
+              <a:t>Resources: Path A: 4A Q14–17 p.36; 5A Q12–15 p.46. B: 7A Q11–14 p.68; 8C Q1–2 p.81. C: 12C Q1–2 p.118; 13A Q6,10 p.128.</a:t>
             </a:r>
           </a:p>
         </p:txBody>
@@ -35129,7 +35129,7 @@
                 </a:solidFill>
                 <a:latin typeface="Arial"/>
               </a:rPr>
-              <a:t>Textbook formula sheet p.219; conversion factors pp.220–221; relevant chapters as needed</a:t>
+              <a:t>Textbook formula sheet p.361; conversion factors pp.362–363; relevant chapters as needed</a:t>
             </a:r>
           </a:p>
         </p:txBody>
@@ -35815,7 +35815,7 @@
                 </a:solidFill>
                 <a:latin typeface="Arial"/>
               </a:rPr>
-              <a:t>Textbook formula sheet p.219; conversion factors pp.220–221; relevant chapters as needed</a:t>
+              <a:t>Textbook formula sheet p.361; conversion factors pp.362–363; relevant chapters as needed</a:t>
             </a:r>
           </a:p>
         </p:txBody>
@@ -36501,7 +36501,7 @@
                 </a:solidFill>
                 <a:latin typeface="Arial"/>
               </a:rPr>
-              <a:t>Textbook formula sheet p.219; conversion factors pp.220–221; relevant chapters as needed</a:t>
+              <a:t>Textbook formula sheet p.361; conversion factors pp.362–363; relevant chapters as needed</a:t>
             </a:r>
           </a:p>
         </p:txBody>
@@ -37212,7 +37212,7 @@
                 </a:solidFill>
                 <a:latin typeface="Arial"/>
               </a:rPr>
-              <a:t>Textbook formula sheet p.219; conversion factors pp.220–221; relevant chapters as needed</a:t>
+              <a:t>Textbook formula sheet p.361; conversion factors pp.362–363; relevant chapters as needed</a:t>
             </a:r>
           </a:p>
         </p:txBody>
@@ -37923,7 +37923,7 @@
                 </a:solidFill>
                 <a:latin typeface="Arial"/>
               </a:rPr>
-              <a:t>Textbook formula sheet p.219; conversion factors pp.220–221; relevant chapters as needed</a:t>
+              <a:t>Textbook formula sheet p.361; conversion factors pp.362–363; relevant chapters as needed</a:t>
             </a:r>
           </a:p>
         </p:txBody>
@@ -38609,7 +38609,7 @@
                 </a:solidFill>
                 <a:latin typeface="Arial"/>
               </a:rPr>
-              <a:t>Textbook formula sheet p.219; conversion factors pp.220–221; relevant chapters as needed</a:t>
+              <a:t>Textbook formula sheet p.361; conversion factors pp.362–363; relevant chapters as needed</a:t>
             </a:r>
           </a:p>
         </p:txBody>
@@ -39295,7 +39295,7 @@
                 </a:solidFill>
                 <a:latin typeface="Arial"/>
               </a:rPr>
-              <a:t>Textbook formula sheet p.219; conversion factors pp.220–221; relevant chapters as needed</a:t>
+              <a:t>Textbook formula sheet p.361; conversion factors pp.362–363; relevant chapters as needed</a:t>
             </a:r>
           </a:p>
         </p:txBody>
@@ -40006,7 +40006,7 @@
                 </a:solidFill>
                 <a:latin typeface="Arial"/>
               </a:rPr>
-              <a:t>Textbook formula sheet p.219; conversion factors pp.220–221; relevant chapters as needed</a:t>
+              <a:t>Textbook formula sheet p.361; conversion factors pp.362–363; relevant chapters as needed</a:t>
             </a:r>
           </a:p>
         </p:txBody>
@@ -40717,7 +40717,7 @@
                 </a:solidFill>
                 <a:latin typeface="Arial"/>
               </a:rPr>
-              <a:t>Textbook formula sheet p.219; conversion factors pp.220–221; relevant chapters as needed</a:t>
+              <a:t>Textbook formula sheet p.361; conversion factors pp.362–363; relevant chapters as needed</a:t>
             </a:r>
           </a:p>
         </p:txBody>
@@ -41403,7 +41403,7 @@
                 </a:solidFill>
                 <a:latin typeface="Arial"/>
               </a:rPr>
-              <a:t>Textbook formula sheet p.219; conversion factors pp.220–221; relevant chapters as needed</a:t>
+              <a:t>Textbook formula sheet p.361; conversion factors pp.362–363; relevant chapters as needed</a:t>
             </a:r>
           </a:p>
         </p:txBody>
@@ -42224,7 +42224,7 @@
                 </a:solidFill>
                 <a:latin typeface="Arial"/>
               </a:rPr>
-              <a:t>Textbook Chapter 4–5 pp.56–87; Chapter 7–8 pp.108–134; Chapter 12–13 pp.188–209, selected</a:t>
+              <a:t>Textbook Chapter 4–5 pp.88–132; Chapter 7–8 pp.164–204; Chapter 12–13 pp.298–333, selected</a:t>
             </a:r>
           </a:p>
         </p:txBody>
@@ -43310,7 +43310,7 @@
                 </a:solidFill>
                 <a:latin typeface="Arial"/>
               </a:rPr>
-              <a:t>Textbook formula sheet p.219; conversion factors pp.220–221; relevant chapters as needed</a:t>
+              <a:t>Textbook formula sheet p.361; conversion factors pp.362–363; relevant chapters as needed</a:t>
             </a:r>
           </a:p>
         </p:txBody>
@@ -43510,7 +43510,7 @@
                 </a:solidFill>
                 <a:latin typeface="Arial"/>
               </a:rPr>
-              <a:t>Resources: Paper fallback: 3A Q8–9 p.19; 6B Q2 p.41; 7A Q11 p.45; 8C Q1–2 p.55; 10A Q5–6 p.63; 12C Q1–2 p.79.</a:t>
+              <a:t>Resources: Paper fallback: 3A Q8–9 p.25; 6B Q2 p.57; 7A Q11 p.68; 8C Q1–2 p.81; 10A Q5–6 p.93; 12C Q1–2 p.118.</a:t>
             </a:r>
           </a:p>
         </p:txBody>
@@ -44124,7 +44124,7 @@
                 </a:solidFill>
                 <a:latin typeface="Arial"/>
               </a:rPr>
-              <a:t>Textbook formula sheet p.219; conversion factors pp.220–221; relevant chapters as needed</a:t>
+              <a:t>Textbook formula sheet p.361; conversion factors pp.362–363; relevant chapters as needed</a:t>
             </a:r>
           </a:p>
         </p:txBody>
@@ -44324,7 +44324,7 @@
                 </a:solidFill>
                 <a:latin typeface="Arial"/>
               </a:rPr>
-              <a:t>Resources: Paper fallback: 3A Q8–9 p.19; 6B Q2 p.41; 7A Q11 p.45; 8C Q1–2 p.55; 10A Q5–6 p.63; 12C Q1–2 p.79.</a:t>
+              <a:t>Resources: Paper fallback: 3A Q8–9 p.25; 6B Q2 p.57; 7A Q11 p.68; 8C Q1–2 p.81; 10A Q5–6 p.93; 12C Q1–2 p.118.</a:t>
             </a:r>
           </a:p>
         </p:txBody>
@@ -45073,7 +45073,7 @@
                 </a:solidFill>
                 <a:latin typeface="Arial"/>
               </a:rPr>
-              <a:t>Textbook Chapter 4–5 pp.56–87; Chapter 7–8 pp.108–134; Chapter 12–13 pp.188–209, selected</a:t>
+              <a:t>Textbook Chapter 4–5 pp.88–132; Chapter 7–8 pp.164–204; Chapter 12–13 pp.298–333, selected</a:t>
             </a:r>
           </a:p>
         </p:txBody>
@@ -46131,7 +46131,7 @@
                 <a:ea typeface="Arial" pitchFamily="34" charset="-122"/>
                 <a:cs typeface="Arial" pitchFamily="34" charset="-120"/>
               </a:rPr>
-              <a:t>4A Q14–17 p.26; 5A Q12–15 p.33.</a:t>
+              <a:t>4A Q14–17 p.36; 5A Q12–15 p.46.</a:t>
             </a:r>
             <a:endParaRPr lang="en-US" sz="1800" dirty="0"/>
           </a:p>
@@ -46206,7 +46206,7 @@
                 <a:ea typeface="Arial" pitchFamily="34" charset="-122"/>
                 <a:cs typeface="Arial" pitchFamily="34" charset="-120"/>
               </a:rPr>
-              <a:t>7A Q11–14 pp.45–46; 8C Q1–2 p.55.</a:t>
+              <a:t>7A Q11–14 p.68; 8C Q1–2 p.81.</a:t>
             </a:r>
             <a:endParaRPr lang="en-US" sz="1800" dirty="0"/>
           </a:p>
@@ -46281,7 +46281,7 @@
                 <a:ea typeface="Arial" pitchFamily="34" charset="-122"/>
                 <a:cs typeface="Arial" pitchFamily="34" charset="-120"/>
               </a:rPr>
-              <a:t>12C Q1–2 p.79; 13A Q6,10 p.82.</a:t>
+              <a:t>12C Q1–2 p.118; 13A Q6,10 p.128.</a:t>
             </a:r>
             <a:endParaRPr lang="en-US" sz="1800" dirty="0"/>
           </a:p>
@@ -46959,7 +46959,7 @@
                 </a:solidFill>
                 <a:latin typeface="Arial"/>
               </a:rPr>
-              <a:t>Textbook  |  page 66</a:t>
+              <a:t>Textbook  |  page 99</a:t>
             </a:r>
           </a:p>
         </p:txBody>
@@ -47007,7 +47007,7 @@
                 </a:solidFill>
                 <a:latin typeface="Arial"/>
               </a:rPr>
-              <a:t>Textbook Chapter 4–5 pp.56–87; Chapter 7–8 pp.108–134; Chapter 12–13 pp.188–209, selected</a:t>
+              <a:t>Textbook Chapter 4–5 pp.88–132; Chapter 7–8 pp.164–204; Chapter 12–13 pp.298–333, selected</a:t>
             </a:r>
           </a:p>
         </p:txBody>
@@ -47645,7 +47645,7 @@
                 </a:solidFill>
                 <a:latin typeface="Arial"/>
               </a:rPr>
-              <a:t>Textbook  |  page 127</a:t>
+              <a:t>Textbook  |  pages 195–196</a:t>
             </a:r>
           </a:p>
         </p:txBody>
@@ -47693,7 +47693,7 @@
                 </a:solidFill>
                 <a:latin typeface="Arial"/>
               </a:rPr>
-              <a:t>Textbook Chapter 4–5 pp.56–87; Chapter 7–8 pp.108–134; Chapter 12–13 pp.188–209, selected</a:t>
+              <a:t>Textbook Chapter 4–5 pp.88–132; Chapter 7–8 pp.164–204; Chapter 12–13 pp.298–333, selected</a:t>
             </a:r>
           </a:p>
         </p:txBody>

--- a/carpentry/intake-142/PowerPoint/Day-24_2026-12-10_Week-7.pptx
+++ b/carpentry/intake-142/PowerPoint/Day-24_2026-12-10_Week-7.pptx
@@ -21835,6 +21835,104 @@
           </a:p>
         </p:txBody>
       </p:sp>
+      <p:sp>
+        <p:nvSpPr>
+          <p:cNvPr id="22" name="Play quiz W07-L03"/>
+          <p:cNvSpPr txBox="1"/>
+          <p:nvPr/>
+        </p:nvSpPr>
+        <p:spPr>
+          <a:xfrm>
+            <a:off x="6355080" y="6606540"/>
+            <a:ext cx="822960" cy="210312"/>
+          </a:xfrm>
+          <a:prstGeom prst="rect">
+            <a:avLst/>
+          </a:prstGeom>
+          <a:noFill/>
+        </p:spPr>
+        <p:txBody>
+          <a:bodyPr wrap="square" lIns="0" rIns="0" tIns="0" bIns="0" anchor="t">
+            <a:normAutofit fontScale="100000" lnSpcReduction="0"/>
+          </a:bodyPr>
+          <a:lstStyle/>
+          <a:p>
+            <a:pPr>
+              <a:spcBef>
+                <a:spcPts val="0"/>
+              </a:spcBef>
+              <a:spcAft>
+                <a:spcPts val="0"/>
+              </a:spcAft>
+              <a:defRPr sz="1000" b="0">
+                <a:solidFill>
+                  <a:srgbClr val="D0002B"/>
+                </a:solidFill>
+                <a:latin typeface="Arial"/>
+              </a:defRPr>
+            </a:pPr>
+            <a:r>
+              <a:rPr sz="1000">
+                <a:solidFill>
+                  <a:srgbClr val="F7F8FC"/>
+                </a:solidFill>
+                <a:latin typeface="Arial"/>
+                <a:hlinkClick r:id="rId8"/>
+              </a:rPr>
+              <a:t>Play quiz</a:t>
+            </a:r>
+          </a:p>
+        </p:txBody>
+      </p:sp>
+      <p:sp>
+        <p:nvSpPr>
+          <p:cNvPr id="23" name="Quiz PDF W07-L03"/>
+          <p:cNvSpPr txBox="1"/>
+          <p:nvPr/>
+        </p:nvSpPr>
+        <p:spPr>
+          <a:xfrm>
+            <a:off x="7296912" y="6606540"/>
+            <a:ext cx="1005840" cy="210312"/>
+          </a:xfrm>
+          <a:prstGeom prst="rect">
+            <a:avLst/>
+          </a:prstGeom>
+          <a:noFill/>
+        </p:spPr>
+        <p:txBody>
+          <a:bodyPr wrap="square" lIns="0" rIns="0" tIns="0" bIns="0" anchor="t">
+            <a:normAutofit fontScale="100000" lnSpcReduction="0"/>
+          </a:bodyPr>
+          <a:lstStyle/>
+          <a:p>
+            <a:pPr>
+              <a:spcBef>
+                <a:spcPts val="0"/>
+              </a:spcBef>
+              <a:spcAft>
+                <a:spcPts val="0"/>
+              </a:spcAft>
+              <a:defRPr sz="1000" b="0">
+                <a:solidFill>
+                  <a:srgbClr val="D0002B"/>
+                </a:solidFill>
+                <a:latin typeface="Arial"/>
+              </a:defRPr>
+            </a:pPr>
+            <a:r>
+              <a:rPr sz="1000">
+                <a:solidFill>
+                  <a:srgbClr val="F7F8FC"/>
+                </a:solidFill>
+                <a:latin typeface="Arial"/>
+                <a:hlinkClick r:id="rId9"/>
+              </a:rPr>
+              <a:t>Quiz PDF</a:t>
+            </a:r>
+          </a:p>
+        </p:txBody>
+      </p:sp>
     </p:spTree>
   </p:cSld>
   <p:clrMapOvr>
@@ -44593,6 +44691,104 @@
                 <a:latin typeface="Arial"/>
               </a:rPr>
               <a:t>Day 24  •  2026-12-10  •  51</a:t>
+            </a:r>
+          </a:p>
+        </p:txBody>
+      </p:sp>
+      <p:sp>
+        <p:nvSpPr>
+          <p:cNvPr id="22" name="Play quiz W07-L04"/>
+          <p:cNvSpPr txBox="1"/>
+          <p:nvPr/>
+        </p:nvSpPr>
+        <p:spPr>
+          <a:xfrm>
+            <a:off x="6355080" y="6606540"/>
+            <a:ext cx="822960" cy="210312"/>
+          </a:xfrm>
+          <a:prstGeom prst="rect">
+            <a:avLst/>
+          </a:prstGeom>
+          <a:noFill/>
+        </p:spPr>
+        <p:txBody>
+          <a:bodyPr wrap="square" lIns="0" rIns="0" tIns="0" bIns="0" anchor="t">
+            <a:normAutofit fontScale="100000" lnSpcReduction="0"/>
+          </a:bodyPr>
+          <a:lstStyle/>
+          <a:p>
+            <a:pPr>
+              <a:spcBef>
+                <a:spcPts val="0"/>
+              </a:spcBef>
+              <a:spcAft>
+                <a:spcPts val="0"/>
+              </a:spcAft>
+              <a:defRPr sz="1000" b="0">
+                <a:solidFill>
+                  <a:srgbClr val="D0002B"/>
+                </a:solidFill>
+                <a:latin typeface="Arial"/>
+              </a:defRPr>
+            </a:pPr>
+            <a:r>
+              <a:rPr sz="1000">
+                <a:solidFill>
+                  <a:srgbClr val="F7F8FC"/>
+                </a:solidFill>
+                <a:latin typeface="Arial"/>
+                <a:hlinkClick r:id="rId8"/>
+              </a:rPr>
+              <a:t>Play quiz</a:t>
+            </a:r>
+          </a:p>
+        </p:txBody>
+      </p:sp>
+      <p:sp>
+        <p:nvSpPr>
+          <p:cNvPr id="23" name="Quiz PDF W07-L04"/>
+          <p:cNvSpPr txBox="1"/>
+          <p:nvPr/>
+        </p:nvSpPr>
+        <p:spPr>
+          <a:xfrm>
+            <a:off x="7296912" y="6606540"/>
+            <a:ext cx="1005840" cy="210312"/>
+          </a:xfrm>
+          <a:prstGeom prst="rect">
+            <a:avLst/>
+          </a:prstGeom>
+          <a:noFill/>
+        </p:spPr>
+        <p:txBody>
+          <a:bodyPr wrap="square" lIns="0" rIns="0" tIns="0" bIns="0" anchor="t">
+            <a:normAutofit fontScale="100000" lnSpcReduction="0"/>
+          </a:bodyPr>
+          <a:lstStyle/>
+          <a:p>
+            <a:pPr>
+              <a:spcBef>
+                <a:spcPts val="0"/>
+              </a:spcBef>
+              <a:spcAft>
+                <a:spcPts val="0"/>
+              </a:spcAft>
+              <a:defRPr sz="1000" b="0">
+                <a:solidFill>
+                  <a:srgbClr val="D0002B"/>
+                </a:solidFill>
+                <a:latin typeface="Arial"/>
+              </a:defRPr>
+            </a:pPr>
+            <a:r>
+              <a:rPr sz="1000">
+                <a:solidFill>
+                  <a:srgbClr val="F7F8FC"/>
+                </a:solidFill>
+                <a:latin typeface="Arial"/>
+                <a:hlinkClick r:id="rId9"/>
+              </a:rPr>
+              <a:t>Quiz PDF</a:t>
             </a:r>
           </a:p>
         </p:txBody>
